--- a/pptx-asset-library/decks/01_tables/TBL_bulk_numeric_v1.pptx
+++ b/pptx-asset-library/decks/01_tables/TBL_bulk_numeric_v1.pptx
@@ -3183,7 +3183,7 @@
           <a:graphicData uri="http://schemas.openxmlformats.org/drawingml/2006/table">
             <a:tbl>
               <a:tblPr>
-                <a:tableStyleId>{2D5ABB26-0587-4C30-8999-92F81FD0307C}</a:tableStyleId>
+                <a:tableStyleId>{5C22544A-7EE6-4342-B048-85BDC9FD1C3A}</a:tableStyleId>
               </a:tblPr>
               <a:tblGrid>
                 <a:gridCol w="2743200"/>
@@ -4432,7 +4432,7 @@
           <a:graphicData uri="http://schemas.openxmlformats.org/drawingml/2006/table">
             <a:tbl>
               <a:tblPr>
-                <a:tableStyleId>{2D5ABB26-0587-4C30-8999-92F81FD0307C}</a:tableStyleId>
+                <a:tableStyleId>{5C22544A-7EE6-4342-B048-85BDC9FD1C3A}</a:tableStyleId>
               </a:tblPr>
               <a:tblGrid>
                 <a:gridCol w="2743200"/>
@@ -5952,7 +5952,7 @@
           <a:graphicData uri="http://schemas.openxmlformats.org/drawingml/2006/table">
             <a:tbl>
               <a:tblPr>
-                <a:tableStyleId>{2D5ABB26-0587-4C30-8999-92F81FD0307C}</a:tableStyleId>
+                <a:tableStyleId>{5C22544A-7EE6-4342-B048-85BDC9FD1C3A}</a:tableStyleId>
               </a:tblPr>
               <a:tblGrid>
                 <a:gridCol w="2743200"/>
@@ -7383,7 +7383,7 @@
           <a:graphicData uri="http://schemas.openxmlformats.org/drawingml/2006/table">
             <a:tbl>
               <a:tblPr>
-                <a:tableStyleId>{2D5ABB26-0587-4C30-8999-92F81FD0307C}</a:tableStyleId>
+                <a:tableStyleId>{5C22544A-7EE6-4342-B048-85BDC9FD1C3A}</a:tableStyleId>
               </a:tblPr>
               <a:tblGrid>
                 <a:gridCol w="2743200"/>
@@ -9130,7 +9130,7 @@
           <a:graphicData uri="http://schemas.openxmlformats.org/drawingml/2006/table">
             <a:tbl>
               <a:tblPr>
-                <a:tableStyleId>{2D5ABB26-0587-4C30-8999-92F81FD0307C}</a:tableStyleId>
+                <a:tableStyleId>{5C22544A-7EE6-4342-B048-85BDC9FD1C3A}</a:tableStyleId>
               </a:tblPr>
               <a:tblGrid>
                 <a:gridCol w="2743200"/>
@@ -10379,7 +10379,7 @@
           <a:graphicData uri="http://schemas.openxmlformats.org/drawingml/2006/table">
             <a:tbl>
               <a:tblPr>
-                <a:tableStyleId>{2D5ABB26-0587-4C30-8999-92F81FD0307C}</a:tableStyleId>
+                <a:tableStyleId>{5C22544A-7EE6-4342-B048-85BDC9FD1C3A}</a:tableStyleId>
               </a:tblPr>
               <a:tblGrid>
                 <a:gridCol w="2743200"/>
